--- a/assets/pptx/catalog-728.pptx
+++ b/assets/pptx/catalog-728.pptx
@@ -3303,7 +3303,7 @@
                 <a:ea typeface="Ebrima"/>
                 <a:cs typeface="Ebrima"/>
               </a:rPr>
-              <a:t>እንዲደረግ እናውቃለን (2x) [1]</a:t>
+              <a:t>እንዲደረግ እናውቃለን 2x [1]</a:t>
             </a:r>
           </a:p>
         </p:txBody>
@@ -3424,7 +3424,7 @@
                 <a:ea typeface="Ebrima"/>
                 <a:cs typeface="Ebrima"/>
               </a:rPr>
-              <a:t>እንዲደረግ እናውቃለን (2x) [1]</a:t>
+              <a:t>እንዲደረግ እናውቃለን 2x [1]</a:t>
             </a:r>
           </a:p>
         </p:txBody>
@@ -3527,7 +3527,7 @@
                 <a:ea typeface="Ebrima"/>
                 <a:cs typeface="Ebrima"/>
               </a:rPr>
-              <a:t>ነገር ሁሉ ለበጐ ነው (2x)</a:t>
+              <a:t>ነገር ሁሉ ለበጐ ነው 2x</a:t>
             </a:r>
           </a:p>
         </p:txBody>
@@ -3769,7 +3769,7 @@
                 <a:ea typeface="Ebrima"/>
                 <a:cs typeface="Ebrima"/>
               </a:rPr>
-              <a:t>ለሁሉም (ለሁሉም ቀን አለው) (2x)</a:t>
+              <a:t>ለሁሉም ለሁሉም ቀን አለው 2x</a:t>
             </a:r>
           </a:p>
         </p:txBody>
@@ -3890,7 +3890,7 @@
                 <a:ea typeface="Ebrima"/>
                 <a:cs typeface="Ebrima"/>
               </a:rPr>
-              <a:t>እንዲደረግ እናውቃለን (2x) [1]</a:t>
+              <a:t>እንዲደረግ እናውቃለን 2x [1]</a:t>
             </a:r>
           </a:p>
         </p:txBody>
@@ -3975,7 +3975,7 @@
                 <a:ea typeface="Ebrima"/>
                 <a:cs typeface="Ebrima"/>
               </a:rPr>
-              <a:t>ከተሰራልኝ ነገር ለእኔስ የእኔ ጌታ (2x)</a:t>
+              <a:t>ከተሰራልኝ ነገር ለእኔስ የእኔ ጌታ 2x</a:t>
             </a:r>
           </a:p>
         </p:txBody>
@@ -4096,7 +4096,7 @@
                 <a:ea typeface="Ebrima"/>
                 <a:cs typeface="Ebrima"/>
               </a:rPr>
-              <a:t>ለሁሉም (ለሁሉም ቀን አለው/ነገር) (2x)</a:t>
+              <a:t>ለሁሉም ለሁሉም ቀን አለው/ነገር 2x</a:t>
             </a:r>
           </a:p>
         </p:txBody>
